--- a/test/pptx/slide-level-0/h1-h2-with-table/output.pptx
+++ b/test/pptx/slide-level-0/h1-h2-with-table/output.pptx
@@ -3100,37 +3100,37 @@
             <p:ph type="title"/>
           </p:nvPr>
         </p:nvSpPr>
+        <p:spPr/>
+        <p:txBody>
+          <a:bodyPr/>
+          <a:lstStyle/>
+          <a:p>
+            <a:pPr lvl="0" indent="0" marL="0">
+              <a:buNone/>
+            </a:pPr>
+            <a:r>
+              <a:rPr/>
+              <a:t>Hello</a:t>
+            </a:r>
+          </a:p>
+        </p:txBody>
+      </p:sp>
+      <p:sp>
+        <p:nvSpPr>
+          <p:cNvPr id="3" name="Content Placeholder 2"/>
+          <p:cNvSpPr>
+            <a:spLocks noGrp="1"/>
+          </p:cNvSpPr>
+          <p:nvPr>
+            <p:ph idx="1"/>
+          </p:nvPr>
+        </p:nvSpPr>
         <p:spPr>
           <a:xfrm>
-            <a:off x="457201" y="204787"/>
-            <a:ext cx="3008313" cy="871538"/>
+            <a:off x="457200" y="1193800"/>
+            <a:ext cx="8229600" cy="1574800"/>
           </a:xfrm>
         </p:spPr>
-        <p:txBody>
-          <a:bodyPr/>
-          <a:lstStyle/>
-          <a:p>
-            <a:pPr lvl="0" indent="0" marL="0">
-              <a:buNone/>
-            </a:pPr>
-            <a:r>
-              <a:rPr/>
-              <a:t>Hello</a:t>
-            </a:r>
-          </a:p>
-        </p:txBody>
-      </p:sp>
-      <p:sp>
-        <p:nvSpPr>
-          <p:cNvPr id="4" name="Text Placeholder 3"/>
-          <p:cNvSpPr>
-            <a:spLocks noGrp="1"/>
-          </p:cNvSpPr>
-          <p:nvPr>
-            <p:ph idx="2" sz="half" type="body"/>
-          </p:nvPr>
-        </p:nvSpPr>
-        <p:spPr/>
         <p:txBody>
           <a:bodyPr/>
           <a:lstStyle/>
@@ -3159,8 +3159,8 @@
           </p:nvPr>
         </p:nvGraphicFramePr>
         <p:xfrm>
-          <a:off x="3568700" y="203200"/>
-          <a:ext cx="5105400" cy="4381500"/>
+          <a:off x="457200" y="2895600"/>
+          <a:ext cx="8229600" cy="1574800"/>
         </p:xfrm>
         <a:graphic>
           <a:graphicData uri="http://schemas.openxmlformats.org/drawingml/2006/table">
@@ -3169,7 +3169,7 @@
                 <a:tableStyleId>{5C22544A-7EE6-4342-B048-85BDC9FD1C3A}</a:tableStyleId>
               </a:tblPr>
               <a:tblGrid>
-                <a:gridCol w="5105400"/>
+                <a:gridCol w="8229600"/>
               </a:tblGrid>
               <a:tr h="0">
                 <a:tc>
